--- a/graphes/schéma système.pptx
+++ b/graphes/schéma système.pptx
@@ -104,6 +104,11 @@
       </a:defRPr>
     </a:lvl9pPr>
   </p:defaultTextStyle>
+  <p:extLst>
+    <p:ext uri="{EFAFB233-063F-42B5-8137-9DF3F51BA10A}">
+      <p15:sldGuideLst xmlns:p15="http://schemas.microsoft.com/office/powerpoint/2012/main"/>
+    </p:ext>
+  </p:extLst>
 </p:presentation>
 </file>
 
@@ -254,7 +259,7 @@
           <a:p>
             <a:fld id="{4580D7D2-33AA-415C-845A-798464CD3163}" type="datetimeFigureOut">
               <a:rPr lang="fr-FR" smtClean="0"/>
-              <a:t>12/01/2026</a:t>
+              <a:t>22/01/2026</a:t>
             </a:fld>
             <a:endParaRPr lang="fr-FR"/>
           </a:p>
@@ -452,7 +457,7 @@
           <a:p>
             <a:fld id="{4580D7D2-33AA-415C-845A-798464CD3163}" type="datetimeFigureOut">
               <a:rPr lang="fr-FR" smtClean="0"/>
-              <a:t>12/01/2026</a:t>
+              <a:t>22/01/2026</a:t>
             </a:fld>
             <a:endParaRPr lang="fr-FR"/>
           </a:p>
@@ -660,7 +665,7 @@
           <a:p>
             <a:fld id="{4580D7D2-33AA-415C-845A-798464CD3163}" type="datetimeFigureOut">
               <a:rPr lang="fr-FR" smtClean="0"/>
-              <a:t>12/01/2026</a:t>
+              <a:t>22/01/2026</a:t>
             </a:fld>
             <a:endParaRPr lang="fr-FR"/>
           </a:p>
@@ -858,7 +863,7 @@
           <a:p>
             <a:fld id="{4580D7D2-33AA-415C-845A-798464CD3163}" type="datetimeFigureOut">
               <a:rPr lang="fr-FR" smtClean="0"/>
-              <a:t>12/01/2026</a:t>
+              <a:t>22/01/2026</a:t>
             </a:fld>
             <a:endParaRPr lang="fr-FR"/>
           </a:p>
@@ -1133,7 +1138,7 @@
           <a:p>
             <a:fld id="{4580D7D2-33AA-415C-845A-798464CD3163}" type="datetimeFigureOut">
               <a:rPr lang="fr-FR" smtClean="0"/>
-              <a:t>12/01/2026</a:t>
+              <a:t>22/01/2026</a:t>
             </a:fld>
             <a:endParaRPr lang="fr-FR"/>
           </a:p>
@@ -1398,7 +1403,7 @@
           <a:p>
             <a:fld id="{4580D7D2-33AA-415C-845A-798464CD3163}" type="datetimeFigureOut">
               <a:rPr lang="fr-FR" smtClean="0"/>
-              <a:t>12/01/2026</a:t>
+              <a:t>22/01/2026</a:t>
             </a:fld>
             <a:endParaRPr lang="fr-FR"/>
           </a:p>
@@ -1810,7 +1815,7 @@
           <a:p>
             <a:fld id="{4580D7D2-33AA-415C-845A-798464CD3163}" type="datetimeFigureOut">
               <a:rPr lang="fr-FR" smtClean="0"/>
-              <a:t>12/01/2026</a:t>
+              <a:t>22/01/2026</a:t>
             </a:fld>
             <a:endParaRPr lang="fr-FR"/>
           </a:p>
@@ -1951,7 +1956,7 @@
           <a:p>
             <a:fld id="{4580D7D2-33AA-415C-845A-798464CD3163}" type="datetimeFigureOut">
               <a:rPr lang="fr-FR" smtClean="0"/>
-              <a:t>12/01/2026</a:t>
+              <a:t>22/01/2026</a:t>
             </a:fld>
             <a:endParaRPr lang="fr-FR"/>
           </a:p>
@@ -2064,7 +2069,7 @@
           <a:p>
             <a:fld id="{4580D7D2-33AA-415C-845A-798464CD3163}" type="datetimeFigureOut">
               <a:rPr lang="fr-FR" smtClean="0"/>
-              <a:t>12/01/2026</a:t>
+              <a:t>22/01/2026</a:t>
             </a:fld>
             <a:endParaRPr lang="fr-FR"/>
           </a:p>
@@ -2375,7 +2380,7 @@
           <a:p>
             <a:fld id="{4580D7D2-33AA-415C-845A-798464CD3163}" type="datetimeFigureOut">
               <a:rPr lang="fr-FR" smtClean="0"/>
-              <a:t>12/01/2026</a:t>
+              <a:t>22/01/2026</a:t>
             </a:fld>
             <a:endParaRPr lang="fr-FR"/>
           </a:p>
@@ -2663,7 +2668,7 @@
           <a:p>
             <a:fld id="{4580D7D2-33AA-415C-845A-798464CD3163}" type="datetimeFigureOut">
               <a:rPr lang="fr-FR" smtClean="0"/>
-              <a:t>12/01/2026</a:t>
+              <a:t>22/01/2026</a:t>
             </a:fld>
             <a:endParaRPr lang="fr-FR"/>
           </a:p>
@@ -2904,7 +2909,7 @@
           <a:p>
             <a:fld id="{4580D7D2-33AA-415C-845A-798464CD3163}" type="datetimeFigureOut">
               <a:rPr lang="fr-FR" smtClean="0"/>
-              <a:t>12/01/2026</a:t>
+              <a:t>22/01/2026</a:t>
             </a:fld>
             <a:endParaRPr lang="fr-FR"/>
           </a:p>
@@ -3640,8 +3645,8 @@
           </a:p>
         </p:txBody>
       </p:sp>
-      <mc:AlternateContent xmlns:mc="http://schemas.openxmlformats.org/markup-compatibility/2006">
-        <mc:Choice xmlns:a14="http://schemas.microsoft.com/office/drawing/2010/main" Requires="a14">
+      <mc:AlternateContent xmlns:mc="http://schemas.openxmlformats.org/markup-compatibility/2006" xmlns:a14="http://schemas.microsoft.com/office/drawing/2010/main">
+        <mc:Choice Requires="a14">
           <p:sp>
             <p:nvSpPr>
               <p:cNvPr id="16" name="ZoneTexte 15">
@@ -3670,6 +3675,7 @@
               </a:bodyPr>
               <a:lstStyle/>
               <a:p>
+                <a:pPr/>
                 <a14:m>
                   <m:oMathPara xmlns:m="http://schemas.openxmlformats.org/officeDocument/2006/math">
                     <m:oMathParaPr>
@@ -3685,11 +3691,12 @@
                     </m:oMath>
                   </m:oMathPara>
                 </a14:m>
+                <a:endParaRPr/>
               </a:p>
             </p:txBody>
           </p:sp>
         </mc:Choice>
-        <mc:Fallback>
+        <mc:Fallback xmlns="">
           <p:sp>
             <p:nvSpPr>
               <p:cNvPr id="16" name="ZoneTexte 15">
@@ -3846,21 +3853,42 @@
               </a:bodyPr>
               <a:lstStyle/>
               <a:p>
+                <a:pPr/>
                 <a14:m>
                   <m:oMathPara xmlns:m="http://schemas.openxmlformats.org/officeDocument/2006/math">
                     <m:oMathParaPr>
                       <m:jc m:val="centerGroup"/>
                     </m:oMathParaPr>
                     <m:oMath xmlns:m="http://schemas.openxmlformats.org/officeDocument/2006/math">
-                      <m:r>
-                        <a:rPr lang="fr-FR" b="0" i="1" smtClean="0">
-                          <a:latin typeface="Cambria Math" panose="02040503050406030204" pitchFamily="18" charset="0"/>
-                        </a:rPr>
-                        <m:t>h</m:t>
-                      </m:r>
+                      <m:sSub>
+                        <m:sSubPr>
+                          <m:ctrlPr>
+                            <a:rPr lang="fr-FR" b="0" i="1" smtClean="0">
+                              <a:latin typeface="Cambria Math" panose="02040503050406030204" pitchFamily="18" charset="0"/>
+                            </a:rPr>
+                          </m:ctrlPr>
+                        </m:sSubPr>
+                        <m:e>
+                          <m:r>
+                            <a:rPr lang="fr-FR" b="0" i="1" smtClean="0">
+                              <a:latin typeface="Cambria Math" panose="02040503050406030204" pitchFamily="18" charset="0"/>
+                            </a:rPr>
+                            <m:t>h</m:t>
+                          </m:r>
+                        </m:e>
+                        <m:sub>
+                          <m:r>
+                            <a:rPr lang="fr-FR" b="0" i="1" smtClean="0">
+                              <a:latin typeface="Cambria Math" panose="02040503050406030204" pitchFamily="18" charset="0"/>
+                            </a:rPr>
+                            <m:t>0</m:t>
+                          </m:r>
+                        </m:sub>
+                      </m:sSub>
                     </m:oMath>
                   </m:oMathPara>
                 </a14:m>
+                <a:endParaRPr dirty="0"/>
               </a:p>
             </p:txBody>
           </p:sp>
@@ -3891,7 +3919,7 @@
               <a:blipFill>
                 <a:blip r:embed="rId3"/>
                 <a:stretch>
-                  <a:fillRect t="-9836" r="-38776" b="-22951"/>
+                  <a:fillRect r="-24490"/>
                 </a:stretch>
               </a:blipFill>
             </p:spPr>
@@ -3940,21 +3968,42 @@
               </a:bodyPr>
               <a:lstStyle/>
               <a:p>
+                <a:pPr/>
                 <a14:m>
                   <m:oMathPara xmlns:m="http://schemas.openxmlformats.org/officeDocument/2006/math">
                     <m:oMathParaPr>
                       <m:jc m:val="centerGroup"/>
                     </m:oMathParaPr>
                     <m:oMath xmlns:m="http://schemas.openxmlformats.org/officeDocument/2006/math">
-                      <m:r>
-                        <a:rPr lang="fr-FR" b="0" i="1" smtClean="0">
-                          <a:latin typeface="Cambria Math" panose="02040503050406030204" pitchFamily="18" charset="0"/>
-                        </a:rPr>
-                        <m:t>𝑟</m:t>
-                      </m:r>
+                      <m:sSub>
+                        <m:sSubPr>
+                          <m:ctrlPr>
+                            <a:rPr lang="fr-FR" b="0" i="1" smtClean="0">
+                              <a:latin typeface="Cambria Math" panose="02040503050406030204" pitchFamily="18" charset="0"/>
+                            </a:rPr>
+                          </m:ctrlPr>
+                        </m:sSubPr>
+                        <m:e>
+                          <m:r>
+                            <a:rPr lang="fr-FR" b="0" i="1" smtClean="0">
+                              <a:latin typeface="Cambria Math" panose="02040503050406030204" pitchFamily="18" charset="0"/>
+                            </a:rPr>
+                            <m:t>𝑟</m:t>
+                          </m:r>
+                        </m:e>
+                        <m:sub>
+                          <m:r>
+                            <a:rPr lang="fr-FR" b="0" i="1" smtClean="0">
+                              <a:latin typeface="Cambria Math" panose="02040503050406030204" pitchFamily="18" charset="0"/>
+                            </a:rPr>
+                            <m:t>0</m:t>
+                          </m:r>
+                        </m:sub>
+                      </m:sSub>
                     </m:oMath>
                   </m:oMathPara>
                 </a14:m>
+                <a:endParaRPr dirty="0"/>
               </a:p>
             </p:txBody>
           </p:sp>
@@ -3985,7 +4034,7 @@
               <a:blipFill>
                 <a:blip r:embed="rId4"/>
                 <a:stretch>
-                  <a:fillRect t="-9836" r="-34694" b="-22951"/>
+                  <a:fillRect r="-10204"/>
                 </a:stretch>
               </a:blipFill>
             </p:spPr>
@@ -4081,8 +4130,8 @@
             </a:p>
           </p:txBody>
         </p:sp>
-        <mc:AlternateContent xmlns:mc="http://schemas.openxmlformats.org/markup-compatibility/2006">
-          <mc:Choice xmlns:a14="http://schemas.microsoft.com/office/drawing/2010/main" Requires="a14">
+        <mc:AlternateContent xmlns:mc="http://schemas.openxmlformats.org/markup-compatibility/2006" xmlns:a14="http://schemas.microsoft.com/office/drawing/2010/main">
+          <mc:Choice Requires="a14">
             <p:sp>
               <p:nvSpPr>
                 <p:cNvPr id="26" name="ZoneTexte 25">
@@ -4111,6 +4160,7 @@
                 </a:bodyPr>
                 <a:lstStyle/>
                 <a:p>
+                  <a:pPr/>
                   <a14:m>
                     <m:oMathPara xmlns:m="http://schemas.openxmlformats.org/officeDocument/2006/math">
                       <m:oMathParaPr>
@@ -4159,7 +4209,7 @@
               </p:txBody>
             </p:sp>
           </mc:Choice>
-          <mc:Fallback>
+          <mc:Fallback xmlns="">
             <p:sp>
               <p:nvSpPr>
                 <p:cNvPr id="26" name="ZoneTexte 25">
@@ -4205,8 +4255,8 @@
           </mc:Fallback>
         </mc:AlternateContent>
       </p:grpSp>
-      <mc:AlternateContent xmlns:mc="http://schemas.openxmlformats.org/markup-compatibility/2006">
-        <mc:Choice xmlns:a14="http://schemas.microsoft.com/office/drawing/2010/main" Requires="a14">
+      <mc:AlternateContent xmlns:mc="http://schemas.openxmlformats.org/markup-compatibility/2006" xmlns:a14="http://schemas.microsoft.com/office/drawing/2010/main">
+        <mc:Choice Requires="a14">
           <p:sp>
             <p:nvSpPr>
               <p:cNvPr id="30" name="ZoneTexte 29">
@@ -4235,6 +4285,7 @@
               </a:bodyPr>
               <a:lstStyle/>
               <a:p>
+                <a:pPr/>
                 <a14:m>
                   <m:oMathPara xmlns:m="http://schemas.openxmlformats.org/officeDocument/2006/math">
                     <m:oMathParaPr>
@@ -4280,7 +4331,7 @@
             </p:txBody>
           </p:sp>
         </mc:Choice>
-        <mc:Fallback>
+        <mc:Fallback xmlns="">
           <p:sp>
             <p:nvSpPr>
               <p:cNvPr id="30" name="ZoneTexte 29">
@@ -4325,8 +4376,8 @@
           </p:sp>
         </mc:Fallback>
       </mc:AlternateContent>
-      <mc:AlternateContent xmlns:mc="http://schemas.openxmlformats.org/markup-compatibility/2006">
-        <mc:Choice xmlns:a14="http://schemas.microsoft.com/office/drawing/2010/main" Requires="a14">
+      <mc:AlternateContent xmlns:mc="http://schemas.openxmlformats.org/markup-compatibility/2006" xmlns:a14="http://schemas.microsoft.com/office/drawing/2010/main">
+        <mc:Choice Requires="a14">
           <p:sp>
             <p:nvSpPr>
               <p:cNvPr id="31" name="ZoneTexte 30">
@@ -4355,6 +4406,7 @@
               </a:bodyPr>
               <a:lstStyle/>
               <a:p>
+                <a:pPr/>
                 <a14:m>
                   <m:oMathPara xmlns:m="http://schemas.openxmlformats.org/officeDocument/2006/math">
                     <m:oMathParaPr>
@@ -4400,7 +4452,7 @@
             </p:txBody>
           </p:sp>
         </mc:Choice>
-        <mc:Fallback>
+        <mc:Fallback xmlns="">
           <p:sp>
             <p:nvSpPr>
               <p:cNvPr id="31" name="ZoneTexte 30">
